--- a/slides/datasets-in-10-minutes-apps.pptx
+++ b/slides/datasets-in-10-minutes-apps.pptx
@@ -12684,7 +12684,7 @@
                 <a:ea typeface="Noto Sans CJK JP"/>
                 <a:cs typeface="Noto Sans"/>
               </a:rPr>
-              <a:t>2021年の論文Table 3。APPSで微調整し、1候補と5候補の最良結果を比較。</a:t>
+              <a:t>APPSで微調整し、1候補と5候補の最良結果を比較。</a:t>
             </a:r>
           </a:p>
         </p:txBody>
